--- a/Presentation-Psaume-94.pptx
+++ b/Presentation-Psaume-94.pptx
@@ -134,7 +134,7 @@
   <p:extLst>
     <p:ext uri="{521415D9-36F7-43E2-AB2F-B90AF26B5E84}">
       <p14:sectionLst xmlns:p14="http://schemas.microsoft.com/office/powerpoint/2010/main">
-        <p14:section name="Introduction" id="{abb00f85-3d88-915f-92fb-0573c8cb0027}">
+        <p14:section name="Introduction" id="{5ea5fe57-7d3a-05ab-9d55-7bad764a28ad}">
           <p14:sldIdLst>
             <p14:sldId id="256"/>
             <p14:sldId id="257"/>
@@ -143,7 +143,7 @@
             <p14:sldId id="260"/>
           </p14:sldIdLst>
         </p14:section>
-        <p14:section name="I. Le Dieu à qui l'on crie" id="{0f9d253c-704f-b7a4-ebec-7f10ff3ab347}">
+        <p14:section name="I. Le Dieu à qui l'on crie" id="{6f3e74b2-f2b7-c341-02c1-d36bf5703a52}">
           <p14:sldIdLst>
             <p14:sldId id="261"/>
             <p14:sldId id="262"/>
@@ -152,7 +152,7 @@
             <p14:sldId id="265"/>
           </p14:sldIdLst>
         </p14:section>
-        <p14:section name="II. Le Dieu qui voit" id="{ef12896f-9416-8600-a912-12b14f565973}">
+        <p14:section name="II. Le Dieu qui voit" id="{d9d8ff46-e50e-76df-1cf0-0388db76d12b}">
           <p14:sldIdLst>
             <p14:sldId id="266"/>
             <p14:sldId id="267"/>
@@ -160,7 +160,7 @@
             <p14:sldId id="269"/>
           </p14:sldIdLst>
         </p14:section>
-        <p14:section name="III. Le Dieu qui instruit dans l'attente" id="{7dfa0638-cb1b-69a5-e3c4-ea3d51ab5693}">
+        <p14:section name="III. Le Dieu qui instruit dans l'attente" id="{b880ce1a-22d6-6e59-670b-1c97f032d3bc}">
           <p14:sldIdLst>
             <p14:sldId id="270"/>
             <p14:sldId id="271"/>
@@ -170,7 +170,7 @@
             <p14:sldId id="275"/>
           </p14:sldIdLst>
         </p14:section>
-        <p14:section name="IV. Le Dieu qui soutient et qui rendra" id="{57d1594b-7625-59de-d13b-333fdb8f79fe}">
+        <p14:section name="IV. Le Dieu qui soutient et qui rendra" id="{ee8b99c1-42d6-479d-cfaa-d2ae0468e48a}">
           <p14:sldIdLst>
             <p14:sldId id="276"/>
             <p14:sldId id="277"/>
@@ -179,7 +179,7 @@
             <p14:sldId id="280"/>
           </p14:sldIdLst>
         </p14:section>
-        <p14:section name="Conclusion" id="{bd8a61ca-e2a0-5ac6-0557-4b1e5e7cce72}">
+        <p14:section name="Conclusion" id="{ba28e3f5-81e2-0ac4-c5d1-be92dbee77a4}">
           <p14:sldIdLst>
             <p14:sldId id="281"/>
             <p14:sldId id="282"/>
@@ -590,7 +590,7 @@
           <a:p>
             <a:r>
               <a:rPr lang="en-US" dirty="0"/>
-              <a:t>Lecture publique du Psaume 94 en entier avant l'introduction (environ 2 min), avec une courte pause avant les versets 8, 12 et 16. Durée visée : 42 minutes. Phrase à faire retenir : Dieu voit, Dieu instruit, Dieu rendra.</a:t>
+              <a:t>Lecture publique du Psaume 94 en entier avant l'introduction (environ 2 min), avec une courte pause avant les versets 8, 12 et 16. Durée visée : 42 minutes. Phrase à faire retenir : Dieu voit, Dieu instruit, Dieu rendra. Les gloses de BDB citées sont traduites de l'anglais.</a:t>
             </a:r>
             <a:endParaRPr lang="en-US" dirty="0"/>
           </a:p>
@@ -854,7 +854,7 @@
           <a:p>
             <a:r>
               <a:rPr lang="en-US" dirty="0"/>
-              <a:t>Le français cache un mot-crochet : « ne fait pas attention » (94.7) est lōʾ yābîn, « il ne discerne pas »; « Prenez-y garde » (94.8) est bînû, « discernez ». Ils disaient que Dieu ne discerne pas; c'est à eux de discerner. Le « quand » (mātay) reprend l'interrogatif du verset 3 : le « jusqu'à quand » adressé à Dieu devient un « quand » adressé aux insensés (observation de Kidner, vérifiée au texte hébreu). « Hommes stupides » (bōʿărîm) est un participe, que BDB rattache au verbe « être stupide, borné, fermé », en parallèle avec « insensés » (kĕsîlîm). L'hébreu les interpelle « parmi le peuple » (bāʿām; Darby : « les stupides d'entre le peuple ») : le texte l'appuie sans le trancher. Préparer une phrase simple, sans cours d'hébreu.</a:t>
+              <a:t>Le français cache un mot-crochet : « ne fait pas attention » (94.7) est lōʾ yābîn, « il ne discerne pas »; « Prenez-y garde » (94.8) est bînû, « discernez ». Ils disaient que Dieu ne discerne pas; c'est à eux de discerner. Le « quand » (mātay) reprend l'interrogatif du verset 3 : le « jusqu'à quand » adressé à Dieu devient un « quand » adressé aux insensés (observation de Kidner, vérifiée au texte hébreu). « Hommes stupides » (bōʿărîm) est un participe, que BDB rattache au verbe « être stupide, obtus, réfractaire » (trad.), en parallèle avec « insensés » (kĕsîlîm). L'hébreu les interpelle « parmi le peuple » (bāʿām; Darby : « les stupides d'entre le peuple ») : le texte l'appuie sans le trancher. Préparer une phrase simple, sans cours d'hébreu.</a:t>
             </a:r>
             <a:endParaRPr lang="en-US" dirty="0"/>
           </a:p>
@@ -1470,7 +1470,7 @@
           <a:p>
             <a:r>
               <a:rPr lang="en-US" dirty="0"/>
-              <a:t>Les deux mots de la plainte, « ton peuple » et « ton héritage » (94.5), reviennent au verset 14, rapportés cette fois à l'Éternel. MacArthur (note sur 94.14, avec renvoi à Genèse 15, Jérémie 12.15 et Michée 7.18) : « L'engagement de Dieu envers son peuple, Israël, est indéfectible; il repose sur l'alliance conclue avec lui et sur son amour éternel ». La note en fait le fondement doctrinal des Psaumes 93 à 100, une vérité « destinée à encourager la nation dans une période difficile », et ajoute que « Paul y fait allusion en Rm 11.1 en parlant du salut à venir d'Israël ». Paul reprend, sans nommer sa source, les mots de la Septante du verset 14 (Romains 11.2), lui qui précise « Car moi aussi je suis Israélite » (11.1); son argument aboutit à « Et ainsi tout Israël sera sauvé » (11.26). Verset 15 (texte seul) : le jugement « reviendra » à la justice (ṣedeq); la seconde ligne n'a pas de verbe en hébreu, « l'approuveront » (NEG79) est suppléé (observation de Kidner, vérifiée).</a:t>
+              <a:t>Les deux mots de la plainte, « ton peuple » et « ton héritage » (94.5), reviennent au verset 14, rapportés cette fois à l'Éternel. MacArthur (note sur 94.14, avec renvoi à Genèse 15, Jérémie 12.15 et Michée 7.18) : « L'engagement de Dieu envers son peuple, Israël, est indéfectible; il repose sur l'alliance conclue avec lui et sur son amour éternel ». La note en fait le fondement doctrinal des Psaumes 93 à 100, une vérité « destinée à encourager la nation dans une période difficile », et ajoute que « Paul y fait allusion en Rm 11.1 en parlant du salut à venir d'Israël ». Paul reprend, sans nommer sa source, la formule de la Septante du verset 14 en changeant le sujet (« Dieu » au lieu du « Seigneur ») et le verbe (l'aoriste apōsato) (Romains 11.2), lui qui précise « Car moi aussi je suis Israélite » (11.1); son argument aboutit à « Et ainsi tout Israël sera sauvé » (11.26). Verset 15 (texte seul) : le jugement « reviendra » à la justice (ṣedeq); la seconde ligne n'a pas de verbe en hébreu, « l'approuveront » (NEG79) est suppléé (observation de Kidner, vérifiée).</a:t>
             </a:r>
             <a:endParaRPr lang="en-US" dirty="0"/>
           </a:p>
@@ -5443,7 +5443,7 @@
                   <a:schemeClr val="accent2"/>
                 </a:solidFill>
               </a:rPr>
-              <a:t>II · Le Dieu qui voit · 94.7-8 · texte seul</a:t>
+              <a:t>II · Le Dieu qui voit · 94.8 · texte seul</a:t>
             </a:r>
             <a:endParaRPr lang="en-US" sz="1300" dirty="0"/>
           </a:p>
@@ -11301,7 +11301,7 @@
                   <a:schemeClr val="accent2"/>
                 </a:solidFill>
               </a:rPr>
-              <a:t>L'amour · Michée 7.18</a:t>
+              <a:t>La miséricorde · Michée 7.18</a:t>
             </a:r>
             <a:endParaRPr lang="en-US" sz="1300" dirty="0"/>
           </a:p>
@@ -14745,7 +14745,7 @@
                   <a:schemeClr val="accent2"/>
                 </a:solidFill>
               </a:rPr>
-              <a:t>IV · Le Dieu qui soutient et qui rendra · 94.16-17</a:t>
+              <a:t>IV · Le Dieu qui soutient et qui rendra · 94.16-17 (94.16 : texte seul)</a:t>
             </a:r>
             <a:endParaRPr lang="en-US" sz="1300" dirty="0"/>
           </a:p>
@@ -14923,7 +14923,7 @@
                   <a:schemeClr val="accent2"/>
                 </a:solidFill>
               </a:rPr>
-              <a:t>condition irréelle (lûlê et le parfait)</a:t>
+              <a:t>condition irréelle : lûlê, « si… ne… pas »</a:t>
             </a:r>
             <a:endParaRPr lang="en-US" sz="1400" dirty="0"/>
           </a:p>
@@ -16095,7 +16095,7 @@
                   <a:schemeClr val="bg1"/>
                 </a:solidFill>
               </a:rPr>
-              <a:t>« Quand les pensées s'agitent en foule au-dedans de moi, Tes consolations réjouissent mon âme » (94.19)</a:t>
+              <a:t>« Quand les pensées s'agitent en foule au-dedans de moi, Tes consolations réjouissent mon âme » (94.19, texte seul)</a:t>
             </a:r>
             <a:endParaRPr lang="en-US" sz="1500" dirty="0"/>
           </a:p>
@@ -17919,7 +17919,7 @@
                   <a:schemeClr val="bg1"/>
                 </a:solidFill>
               </a:rPr>
-              <a:t>« Mon Dieu est le rocher de mon refuge » (94.22) devient « L'Eternel, notre Dieu » (94.23).</a:t>
+              <a:t>« Mon Dieu est le rocher de mon refuge » (94.22, texte seul) devient « L'Eternel, notre Dieu » (94.23).</a:t>
             </a:r>
             <a:endParaRPr lang="en-US" sz="1400" dirty="0"/>
           </a:p>
@@ -24223,7 +24223,7 @@
                   <a:schemeClr val="bg1"/>
                 </a:solidFill>
               </a:rPr>
-              <a:t>Le Dieu des vengeances est le « juge de la terre » (94.2).</a:t>
+              <a:t>Le Dieu des vengeances est le « juge de la terre » (94.2). Texte seul.</a:t>
             </a:r>
             <a:endParaRPr lang="en-US" sz="1500" dirty="0"/>
           </a:p>
@@ -24394,7 +24394,7 @@
                   <a:schemeClr val="bg1"/>
                 </a:solidFill>
               </a:rPr>
-              <a:t>« aux orgueilleux selon leurs œuvres! » La réponse viendra au verset 23.</a:t>
+              <a:t>« aux orgueilleux selon leurs œuvres! » La réponse viendra au verset 23. Texte seul.</a:t>
             </a:r>
             <a:endParaRPr lang="en-US" sz="1500" dirty="0"/>
           </a:p>
